--- a/boq/جدول_الكميات_شرائح.pptx
+++ b/boq/جدول_الكميات_شرائح.pptx
@@ -1193,6 +1193,45 @@
           </a:p>
         </p:txBody>
       </p:sp>
+      <p:sp>
+        <p:nvSpPr>
+          <p:cNvPr id="6" name="T1"/>
+          <p:cNvSpPr txBox="1"/>
+          <p:nvPr/>
+        </p:nvSpPr>
+        <p:spPr>
+          <a:xfrm>
+            <a:off x="384048" y="896112"/>
+            <a:ext cx="11430000" cy="310896"/>
+          </a:xfrm>
+          <a:prstGeom prst="rect">
+            <a:avLst/>
+          </a:prstGeom>
+          <a:noFill/>
+          <a:ln/>
+        </p:spPr>
+        <p:txBody>
+          <a:bodyPr wrap="square" lIns="0" tIns="0" rIns="0" bIns="0" rtlCol="0" anchor="ctr"/>
+          <a:lstStyle/>
+          <a:p>
+            <a:pPr rtl="1" algn="r" indent="0" marL="0">
+              <a:buNone/>
+            </a:pPr>
+            <a:r>
+              <a:rPr lang="en-US" sz="1300" b="1" dirty="0">
+                <a:solidFill>
+                  <a:srgbClr val="1E2142"/>
+                </a:solidFill>
+                <a:latin typeface="Tajawal" pitchFamily="34" charset="0"/>
+                <a:ea typeface="Tajawal" pitchFamily="34" charset="-122"/>
+                <a:cs typeface="Tajawal" pitchFamily="34" charset="-120"/>
+              </a:rPr>
+              <a:t>بُني هذا العرض المالي على النطاق الفني المُسلَّم من فريق الوزارة في 22 سبتمبر 2026م، ولا مرجع سواهما، واشتُقّت الكميات من حزم النطاق الخمس عشرة</a:t>
+            </a:r>
+            <a:endParaRPr lang="en-US" sz="1300" dirty="0"/>
+          </a:p>
+        </p:txBody>
+      </p:sp>
       <p:graphicFrame>
         <p:nvGraphicFramePr>
           <p:cNvPr id="2" name="BOQ table"/>
@@ -1208,7 +1247,7 @@
           </p:nvPr>
         </p:nvGraphicFramePr>
         <p:xfrm>
-          <a:off x="384048" y="896112"/>
+          <a:off x="384048" y="1280160"/>
           <a:ext cx="11430000" cy="914400"/>
         </p:xfrm>
         <a:graphic>
@@ -2047,7 +2086,7 @@
                   </a:tcPr>
                 </a:tc>
               </a:tr>
-              <a:tr h="336499">
+              <a:tr h="310896">
                 <a:tc rowSpan="5">
                   <a:txBody>
                     <a:bodyPr/>
@@ -2865,7 +2904,7 @@
                   </a:tcPr>
                 </a:tc>
               </a:tr>
-              <a:tr h="336499">
+              <a:tr h="310896">
                 <a:tc vMerge="1">
                   <a:tcPr/>
                 </a:tc>
@@ -3423,7 +3462,7 @@
                   <a:tcPr/>
                 </a:tc>
               </a:tr>
-              <a:tr h="336499">
+              <a:tr h="310896">
                 <a:tc vMerge="1">
                   <a:tcPr/>
                 </a:tc>
@@ -3981,7 +4020,7 @@
                   <a:tcPr/>
                 </a:tc>
               </a:tr>
-              <a:tr h="336499">
+              <a:tr h="310896">
                 <a:tc vMerge="1">
                   <a:tcPr/>
                 </a:tc>
@@ -4539,7 +4578,7 @@
                   <a:tcPr/>
                 </a:tc>
               </a:tr>
-              <a:tr h="336499">
+              <a:tr h="310896">
                 <a:tc vMerge="1">
                   <a:tcPr/>
                 </a:tc>
@@ -4900,7 +4939,7 @@
                           <a:ea typeface="Tajawal" pitchFamily="34" charset="-122"/>
                           <a:cs typeface="Tajawal" pitchFamily="34" charset="-120"/>
                         </a:rPr>
-                        <a:t>1</a:t>
+                        <a:t>4</a:t>
                       </a:r>
                       <a:endParaRPr lang="en-US" sz="950" dirty="0">
                         <a:latin typeface="Tajawal" charset="0"/>
@@ -5097,7 +5136,7 @@
                   <a:tcPr/>
                 </a:tc>
               </a:tr>
-              <a:tr h="336499">
+              <a:tr h="310896">
                 <a:tc rowSpan="3">
                   <a:txBody>
                     <a:bodyPr/>
@@ -5915,7 +5954,7 @@
                   </a:tcPr>
                 </a:tc>
               </a:tr>
-              <a:tr h="336499">
+              <a:tr h="310896">
                 <a:tc vMerge="1">
                   <a:tcPr/>
                 </a:tc>
@@ -6473,7 +6512,7 @@
                   <a:tcPr/>
                 </a:tc>
               </a:tr>
-              <a:tr h="336499">
+              <a:tr h="310896">
                 <a:tc vMerge="1">
                   <a:tcPr/>
                 </a:tc>
@@ -6834,7 +6873,7 @@
                           <a:ea typeface="Tajawal" pitchFamily="34" charset="-122"/>
                           <a:cs typeface="Tajawal" pitchFamily="34" charset="-120"/>
                         </a:rPr>
-                        <a:t>1</a:t>
+                        <a:t>2</a:t>
                       </a:r>
                       <a:endParaRPr lang="en-US" sz="950" dirty="0">
                         <a:latin typeface="Tajawal" charset="0"/>
@@ -7031,7 +7070,7 @@
                   <a:tcPr/>
                 </a:tc>
               </a:tr>
-              <a:tr h="336499">
+              <a:tr h="310896">
                 <a:tc rowSpan="2">
                   <a:txBody>
                     <a:bodyPr/>
@@ -7849,7 +7888,7 @@
                   </a:tcPr>
                 </a:tc>
               </a:tr>
-              <a:tr h="336499">
+              <a:tr h="310896">
                 <a:tc vMerge="1">
                   <a:tcPr/>
                 </a:tc>
@@ -8407,7 +8446,7 @@
                   <a:tcPr/>
                 </a:tc>
               </a:tr>
-              <a:tr h="336499">
+              <a:tr h="310896">
                 <a:tc rowSpan="5">
                   <a:txBody>
                     <a:bodyPr/>
@@ -9225,7 +9264,7 @@
                   </a:tcPr>
                 </a:tc>
               </a:tr>
-              <a:tr h="336499">
+              <a:tr h="310896">
                 <a:tc vMerge="1">
                   <a:tcPr/>
                 </a:tc>
@@ -9783,7 +9822,7 @@
                   <a:tcPr/>
                 </a:tc>
               </a:tr>
-              <a:tr h="336499">
+              <a:tr h="310896">
                 <a:tc vMerge="1">
                   <a:tcPr/>
                 </a:tc>
@@ -10341,7 +10380,7 @@
                   <a:tcPr/>
                 </a:tc>
               </a:tr>
-              <a:tr h="336499">
+              <a:tr h="310896">
                 <a:tc vMerge="1">
                   <a:tcPr/>
                 </a:tc>
@@ -10899,7 +10938,7 @@
                   <a:tcPr/>
                 </a:tc>
               </a:tr>
-              <a:tr h="336499">
+              <a:tr h="310896">
                 <a:tc vMerge="1">
                   <a:tcPr/>
                 </a:tc>
@@ -11260,7 +11299,7 @@
                           <a:ea typeface="Tajawal" pitchFamily="34" charset="-122"/>
                           <a:cs typeface="Tajawal" pitchFamily="34" charset="-120"/>
                         </a:rPr>
-                        <a:t>1</a:t>
+                        <a:t>4</a:t>
                       </a:r>
                       <a:endParaRPr lang="en-US" sz="950" dirty="0">
                         <a:latin typeface="Tajawal" charset="0"/>
@@ -18352,7 +18391,7 @@
                           <a:ea typeface="Tajawal" pitchFamily="34" charset="-122"/>
                           <a:cs typeface="Tajawal" pitchFamily="34" charset="-120"/>
                         </a:rPr>
-                        <a:t>1</a:t>
+                        <a:t>221</a:t>
                       </a:r>
                       <a:endParaRPr lang="en-US" sz="950" dirty="0">
                         <a:latin typeface="Tajawal" charset="0"/>
@@ -26300,7 +26339,7 @@
                           <a:ea typeface="Tajawal" pitchFamily="34" charset="-122"/>
                           <a:cs typeface="Tajawal" pitchFamily="34" charset="-120"/>
                         </a:rPr>
-                        <a:t>1</a:t>
+                        <a:t>4</a:t>
                       </a:r>
                       <a:endParaRPr lang="en-US" sz="950" dirty="0">
                         <a:latin typeface="Tajawal" charset="0"/>
@@ -28792,7 +28831,7 @@
                           <a:ea typeface="Tajawal" pitchFamily="34" charset="-122"/>
                           <a:cs typeface="Tajawal" pitchFamily="34" charset="-120"/>
                         </a:rPr>
-                        <a:t>1</a:t>
+                        <a:t>3</a:t>
                       </a:r>
                       <a:endParaRPr lang="en-US" sz="950" dirty="0">
                         <a:latin typeface="Tajawal" charset="0"/>
